--- a/docs/content/multivariate_statistics/multivariate_statistics_lecture.pptx
+++ b/docs/content/multivariate_statistics/multivariate_statistics_lecture.pptx
@@ -16085,7 +16085,7 @@
 ## 
 ## $TJH_vs_LEH
 ##          Df SumOfSqs      R2      F Pr(&gt;F)   
-## Model     1    47.72 0.10517 5.6414  0.005 **
+## Model     1    47.72 0.10517 5.6414  0.004 **
 ## Residual 48   406.06 0.89483                 
 ## Total    49   453.78 1.00000                 
 ## ---
@@ -16100,10 +16100,10 @@
 ## Signif. codes:  0 '***' 0.001 '**' 0.01 '*' 0.05 '.' 0.1 ' ' 1
 ## 
 ## $DG_vs_LEH
-##          Df SumOfSqs      R2      F Pr(&gt;F)   
-## Model     1    26.24 0.06493 3.3333   0.01 **
-## Residual 48   377.85 0.93507                 
-## Total    49   404.09 1.00000                 
+##          Df SumOfSqs      R2      F Pr(&gt;F)  
+## Model     1    26.24 0.06493 3.3333  0.015 *
+## Residual 48   377.85 0.93507                
+## Total    49   404.09 1.00000                
 ## ---
 ## Signif. codes:  0 '***' 0.001 '**' 0.01 '*' 0.05 '.' 0.1 ' ' 1
 ## 
@@ -16143,8 +16143,8 @@
 ## 
 ##     DG    HD    LEH  
 ## HD  0.006 -     -    
-## LEH 0.120 0.006 -    
-## TJH 0.018 0.006 0.012
+## LEH 0.108 0.006 -    
+## TJH 0.006 0.006 0.006
 ## 
 ## P value adjustment method: bonferroni</a:t>
             </a:r>

--- a/docs/content/multivariate_statistics/multivariate_statistics_lecture.pptx
+++ b/docs/content/multivariate_statistics/multivariate_statistics_lecture.pptx
@@ -16076,10 +16076,10 @@
 ## [1] "darl_scaled ~ site , strata = Null , permutations 999"
 ## 
 ## $TJH_vs_DG
-##          Df SumOfSqs      R2      F Pr(&gt;F)    
-## Model     1   32.602 0.10636 5.7128  0.001 ***
-## Residual 48  273.930 0.89364                  
-## Total    49  306.532 1.00000                  
+##          Df SumOfSqs      R2      F Pr(&gt;F)   
+## Model     1   32.602 0.10636 5.7128  0.003 **
+## Residual 48  273.930 0.89364                 
+## Total    49  306.532 1.00000                 
 ## ---
 ## Signif. codes:  0 '***' 0.001 '**' 0.01 '*' 0.05 '.' 0.1 ' ' 1
 ## 
@@ -16101,7 +16101,7 @@
 ## 
 ## $DG_vs_LEH
 ##          Df SumOfSqs      R2      F Pr(&gt;F)  
-## Model     1    26.24 0.06493 3.3333  0.015 *
+## Model     1    26.24 0.06493 3.3333  0.022 *
 ## Residual 48   377.85 0.93507                
 ## Total    49   404.09 1.00000                
 ## ---
@@ -16143,8 +16143,8 @@
 ## 
 ##     DG    HD    LEH  
 ## HD  0.006 -     -    
-## LEH 0.108 0.006 -    
-## TJH 0.006 0.006 0.006
+## LEH 0.120 0.006 -    
+## TJH 0.012 0.006 0.006
 ## 
 ## P value adjustment method: bonferroni</a:t>
             </a:r>

--- a/docs/content/multivariate_statistics/multivariate_statistics_lecture.pptx
+++ b/docs/content/multivariate_statistics/multivariate_statistics_lecture.pptx
@@ -16076,16 +16076,16 @@
 ## [1] "darl_scaled ~ site , strata = Null , permutations 999"
 ## 
 ## $TJH_vs_DG
-##          Df SumOfSqs      R2      F Pr(&gt;F)   
-## Model     1   32.602 0.10636 5.7128  0.003 **
-## Residual 48  273.930 0.89364                 
-## Total    49  306.532 1.00000                 
+##          Df SumOfSqs      R2      F Pr(&gt;F)    
+## Model     1   32.602 0.10636 5.7128  0.001 ***
+## Residual 48  273.930 0.89364                  
+## Total    49  306.532 1.00000                  
 ## ---
 ## Signif. codes:  0 '***' 0.001 '**' 0.01 '*' 0.05 '.' 0.1 ' ' 1
 ## 
 ## $TJH_vs_LEH
 ##          Df SumOfSqs      R2      F Pr(&gt;F)   
-## Model     1    47.72 0.10517 5.6414  0.004 **
+## Model     1    47.72 0.10517 5.6414  0.003 **
 ## Residual 48   406.06 0.89483                 
 ## Total    49   453.78 1.00000                 
 ## ---
@@ -16101,7 +16101,7 @@
 ## 
 ## $DG_vs_LEH
 ##          Df SumOfSqs      R2      F Pr(&gt;F)  
-## Model     1    26.24 0.06493 3.3333  0.022 *
+## Model     1    26.24 0.06493 3.3333  0.021 *
 ## Residual 48   377.85 0.93507                
 ## Total    49   404.09 1.00000                
 ## ---
@@ -16143,8 +16143,8 @@
 ## 
 ##     DG    HD    LEH  
 ## HD  0.006 -     -    
-## LEH 0.120 0.006 -    
-## TJH 0.012 0.006 0.006
+## LEH 0.132 0.006 -    
+## TJH 0.012 0.006 0.012
 ## 
 ## P value adjustment method: bonferroni</a:t>
             </a:r>

--- a/docs/content/multivariate_statistics/multivariate_statistics_lecture.pptx
+++ b/docs/content/multivariate_statistics/multivariate_statistics_lecture.pptx
@@ -16076,18 +16076,18 @@
 ## [1] "darl_scaled ~ site , strata = Null , permutations 999"
 ## 
 ## $TJH_vs_DG
-##          Df SumOfSqs      R2      F Pr(&gt;F)    
-## Model     1   32.602 0.10636 5.7128  0.001 ***
-## Residual 48  273.930 0.89364                  
-## Total    49  306.532 1.00000                  
+##          Df SumOfSqs      R2      F Pr(&gt;F)   
+## Model     1   32.602 0.10636 5.7128  0.003 **
+## Residual 48  273.930 0.89364                 
+## Total    49  306.532 1.00000                 
 ## ---
 ## Signif. codes:  0 '***' 0.001 '**' 0.01 '*' 0.05 '.' 0.1 ' ' 1
 ## 
 ## $TJH_vs_LEH
-##          Df SumOfSqs      R2      F Pr(&gt;F)   
-## Model     1    47.72 0.10517 5.6414  0.003 **
-## Residual 48   406.06 0.89483                 
-## Total    49   453.78 1.00000                 
+##          Df SumOfSqs      R2      F Pr(&gt;F)    
+## Model     1    47.72 0.10517 5.6414  0.001 ***
+## Residual 48   406.06 0.89483                  
+## Total    49   453.78 1.00000                  
 ## ---
 ## Signif. codes:  0 '***' 0.001 '**' 0.01 '*' 0.05 '.' 0.1 ' ' 1
 ## 
@@ -16101,7 +16101,7 @@
 ## 
 ## $DG_vs_LEH
 ##          Df SumOfSqs      R2      F Pr(&gt;F)  
-## Model     1    26.24 0.06493 3.3333  0.021 *
+## Model     1    26.24 0.06493 3.3333  0.018 *
 ## Residual 48   377.85 0.93507                
 ## Total    49   404.09 1.00000                
 ## ---
@@ -16143,7 +16143,7 @@
 ## 
 ##     DG    HD    LEH  
 ## HD  0.006 -     -    
-## LEH 0.132 0.006 -    
+## LEH 0.126 0.006 -    
 ## TJH 0.012 0.006 0.012
 ## 
 ## P value adjustment method: bonferroni</a:t>

--- a/docs/content/multivariate_statistics/multivariate_statistics_lecture.pptx
+++ b/docs/content/multivariate_statistics/multivariate_statistics_lecture.pptx
@@ -16084,10 +16084,10 @@
 ## Signif. codes:  0 '***' 0.001 '**' 0.01 '*' 0.05 '.' 0.1 ' ' 1
 ## 
 ## $TJH_vs_LEH
-##          Df SumOfSqs      R2      F Pr(&gt;F)    
-## Model     1    47.72 0.10517 5.6414  0.001 ***
-## Residual 48   406.06 0.89483                  
-## Total    49   453.78 1.00000                  
+##          Df SumOfSqs      R2      F Pr(&gt;F)   
+## Model     1    47.72 0.10517 5.6414  0.002 **
+## Residual 48   406.06 0.89483                 
+## Total    49   453.78 1.00000                 
 ## ---
 ## Signif. codes:  0 '***' 0.001 '**' 0.01 '*' 0.05 '.' 0.1 ' ' 1
 ## 
@@ -16101,7 +16101,7 @@
 ## 
 ## $DG_vs_LEH
 ##          Df SumOfSqs      R2      F Pr(&gt;F)  
-## Model     1    26.24 0.06493 3.3333  0.018 *
+## Model     1    26.24 0.06493 3.3333  0.023 *
 ## Residual 48   377.85 0.93507                
 ## Total    49   404.09 1.00000                
 ## ---
@@ -16143,8 +16143,8 @@
 ## 
 ##     DG    HD    LEH  
 ## HD  0.006 -     -    
-## LEH 0.126 0.006 -    
-## TJH 0.012 0.006 0.012
+## LEH 0.090 0.006 -    
+## TJH 0.012 0.006 0.018
 ## 
 ## P value adjustment method: bonferroni</a:t>
             </a:r>

--- a/docs/content/multivariate_statistics/multivariate_statistics_lecture.pptx
+++ b/docs/content/multivariate_statistics/multivariate_statistics_lecture.pptx
@@ -21403,7 +21403,7 @@
                 </a:solidFill>
                 <a:latin typeface="Courier"/>
               </a:rPr>
-              <a:t>## Model     1   32.602 0.10636 5.7128  0.002 **</a:t>
+              <a:t>## Model     1   32.602 0.10636 5.7128  0.004 **</a:t>
             </a:r>
             <a:br/>
             <a:r>
@@ -21483,7 +21483,7 @@
                 </a:solidFill>
                 <a:latin typeface="Courier"/>
               </a:rPr>
-              <a:t>## Model     1    47.72 0.10517 5.6414  0.005 **</a:t>
+              <a:t>## Model     1    47.72 0.10517 5.6414  0.003 **</a:t>
             </a:r>
             <a:br/>
             <a:r>
@@ -21643,7 +21643,7 @@
                 </a:solidFill>
                 <a:latin typeface="Courier"/>
               </a:rPr>
-              <a:t>## Model     1    26.24 0.06493 3.3333  0.018 *</a:t>
+              <a:t>## Model     1    26.24 0.06493 3.3333  0.015 *</a:t>
             </a:r>
             <a:br/>
             <a:r>

--- a/docs/content/multivariate_statistics/multivariate_statistics_lecture.pptx
+++ b/docs/content/multivariate_statistics/multivariate_statistics_lecture.pptx
@@ -21403,7 +21403,7 @@
                 </a:solidFill>
                 <a:latin typeface="Courier"/>
               </a:rPr>
-              <a:t>## Model     1   32.602 0.10636 5.7128  0.004 **</a:t>
+              <a:t>## Model     1   32.602 0.10636 5.7128  0.002 **</a:t>
             </a:r>
             <a:br/>
             <a:r>
@@ -21483,7 +21483,7 @@
                 </a:solidFill>
                 <a:latin typeface="Courier"/>
               </a:rPr>
-              <a:t>## Model     1    47.72 0.10517 5.6414  0.003 **</a:t>
+              <a:t>## Model     1    47.72 0.10517 5.6414  0.002 **</a:t>
             </a:r>
             <a:br/>
             <a:r>
@@ -21643,7 +21643,7 @@
                 </a:solidFill>
                 <a:latin typeface="Courier"/>
               </a:rPr>
-              <a:t>## Model     1    26.24 0.06493 3.3333  0.015 *</a:t>
+              <a:t>## Model     1    26.24 0.06493 3.3333  0.027 *</a:t>
             </a:r>
             <a:br/>
             <a:r>
@@ -22314,7 +22314,7 @@
                 </a:solidFill>
                 <a:latin typeface="Courier"/>
               </a:rPr>
-              <a:t>## LEH 0.108 0.006 -    </a:t>
+              <a:t>## LEH 0.126 0.006 -    </a:t>
             </a:r>
             <a:br/>
             <a:r>
@@ -22324,7 +22324,7 @@
                 </a:solidFill>
                 <a:latin typeface="Courier"/>
               </a:rPr>
-              <a:t>## TJH 0.006 0.006 0.012</a:t>
+              <a:t>## TJH 0.030 0.006 0.018</a:t>
             </a:r>
             <a:br/>
             <a:r>

--- a/docs/content/multivariate_statistics/multivariate_statistics_lecture.pptx
+++ b/docs/content/multivariate_statistics/multivariate_statistics_lecture.pptx
@@ -4444,7 +4444,7 @@
             </a:pPr>
             <a:r>
               <a:rPr/>
-              <a:t>https://upload.wikimedia.org/wikipedia/commons/thumb/f/f5/GaussianScatterPCA.svg/500px-GaussianScatterPCA.svg.png</a:t>
+              <a:t>Scatterplot of a correlated two-variable Gaussian point cloud with two perpendicular black arrows overlaid, the longer arrow pointing along the direction of greatest spread (the first principal axis) and the shorter arrow perpendicular to it (the second), illustrating how PCA finds new axes aligned with the directions of maximum variance.</a:t>
             </a:r>
           </a:p>
         </p:txBody>
@@ -7920,7 +7920,7 @@
             </a:pPr>
             <a:r>
               <a:rPr/>
-              <a:t>image of a cobra lily Darlingtonia californica</a:t>
+              <a:t>Photo of a cobra lily (Darlingtonia californica) showing its hooded, pitcher-shaped leaves and forked, tongue-like appendages, the carnivorous plant whose morphology this lecture’s PCA example analyzes.</a:t>
             </a:r>
           </a:p>
         </p:txBody>
@@ -11860,8 +11860,8 @@
         </p:blipFill>
         <p:spPr bwMode="auto">
           <a:xfrm>
-            <a:off x="5486400" y="1295400"/>
-            <a:ext cx="2565400" cy="3276600"/>
+            <a:off x="5689600" y="1295400"/>
+            <a:ext cx="2171700" cy="2768600"/>
           </a:xfrm>
           <a:prstGeom prst="rect">
             <a:avLst/>
@@ -11874,6 +11874,38 @@
           </a:ln>
         </p:spPr>
       </p:pic>
+      <p:sp>
+        <p:nvSpPr>
+          <p:cNvPr id="1" name="TextBox 3"/>
+          <p:cNvSpPr txBox="1"/>
+          <p:nvPr>
+            <p:ph idx="1"/>
+          </p:nvPr>
+        </p:nvSpPr>
+        <p:spPr>
+          <a:xfrm>
+            <a:off x="4749800" y="4064000"/>
+            <a:ext cx="4038600" cy="508000"/>
+          </a:xfrm>
+          <a:prstGeom prst="rect">
+            <a:avLst/>
+          </a:prstGeom>
+          <a:noFill/>
+        </p:spPr>
+        <p:txBody>
+          <a:bodyPr/>
+          <a:lstStyle/>
+          <a:p>
+            <a:pPr lvl="0" indent="0" marL="0" algn="ctr">
+              <a:buNone/>
+            </a:pPr>
+            <a:r>
+              <a:rPr/>
+              <a:t>Vintage-style line illustration of three Darlingtonia pitcher-leaf structures with their hooded tops, tube bodies, and forked wing appendages labeled by shape, showing the plant parts behind variables like height, mouth diameter, tube diameter, and wing length/spread used in the PCA.</a:t>
+            </a:r>
+          </a:p>
+        </p:txBody>
+      </p:sp>
       <p:sp>
         <p:nvSpPr>
           <p:cNvPr id="6" name="Content Placeholder 5"/>
@@ -21393,6 +21425,86 @@
                 </a:solidFill>
                 <a:latin typeface="Courier"/>
               </a:rPr>
+              <a:t>##          Df SumOfSqs      R2      F Pr(&gt;F)    </a:t>
+            </a:r>
+            <a:br/>
+            <a:r>
+              <a:rPr i="1">
+                <a:solidFill>
+                  <a:srgbClr val="5E5E5E"/>
+                </a:solidFill>
+                <a:latin typeface="Courier"/>
+              </a:rPr>
+              <a:t>## Model     1   32.602 0.10636 5.7128  0.001 ***</a:t>
+            </a:r>
+            <a:br/>
+            <a:r>
+              <a:rPr i="1">
+                <a:solidFill>
+                  <a:srgbClr val="5E5E5E"/>
+                </a:solidFill>
+                <a:latin typeface="Courier"/>
+              </a:rPr>
+              <a:t>## Residual 48  273.930 0.89364                  </a:t>
+            </a:r>
+            <a:br/>
+            <a:r>
+              <a:rPr i="1">
+                <a:solidFill>
+                  <a:srgbClr val="5E5E5E"/>
+                </a:solidFill>
+                <a:latin typeface="Courier"/>
+              </a:rPr>
+              <a:t>## Total    49  306.532 1.00000                  </a:t>
+            </a:r>
+            <a:br/>
+            <a:r>
+              <a:rPr i="1">
+                <a:solidFill>
+                  <a:srgbClr val="5E5E5E"/>
+                </a:solidFill>
+                <a:latin typeface="Courier"/>
+              </a:rPr>
+              <a:t>## ---</a:t>
+            </a:r>
+            <a:br/>
+            <a:r>
+              <a:rPr i="1">
+                <a:solidFill>
+                  <a:srgbClr val="5E5E5E"/>
+                </a:solidFill>
+                <a:latin typeface="Courier"/>
+              </a:rPr>
+              <a:t>## Signif. codes:  0 '***' 0.001 '**' 0.01 '*' 0.05 '.' 0.1 ' ' 1</a:t>
+            </a:r>
+            <a:br/>
+            <a:r>
+              <a:rPr i="1">
+                <a:solidFill>
+                  <a:srgbClr val="5E5E5E"/>
+                </a:solidFill>
+                <a:latin typeface="Courier"/>
+              </a:rPr>
+              <a:t>## </a:t>
+            </a:r>
+            <a:br/>
+            <a:r>
+              <a:rPr i="1">
+                <a:solidFill>
+                  <a:srgbClr val="5E5E5E"/>
+                </a:solidFill>
+                <a:latin typeface="Courier"/>
+              </a:rPr>
+              <a:t>## $TJH_vs_LEH</a:t>
+            </a:r>
+            <a:br/>
+            <a:r>
+              <a:rPr i="1">
+                <a:solidFill>
+                  <a:srgbClr val="5E5E5E"/>
+                </a:solidFill>
+                <a:latin typeface="Courier"/>
+              </a:rPr>
               <a:t>##          Df SumOfSqs      R2      F Pr(&gt;F)   </a:t>
             </a:r>
             <a:br/>
@@ -21403,7 +21515,7 @@
                 </a:solidFill>
                 <a:latin typeface="Courier"/>
               </a:rPr>
-              <a:t>## Model     1   32.602 0.10636 5.7128  0.002 **</a:t>
+              <a:t>## Model     1    47.72 0.10517 5.6414  0.005 **</a:t>
             </a:r>
             <a:br/>
             <a:r>
@@ -21413,7 +21525,7 @@
                 </a:solidFill>
                 <a:latin typeface="Courier"/>
               </a:rPr>
-              <a:t>## Residual 48  273.930 0.89364                 </a:t>
+              <a:t>## Residual 48   406.06 0.89483                 </a:t>
             </a:r>
             <a:br/>
             <a:r>
@@ -21423,7 +21535,7 @@
                 </a:solidFill>
                 <a:latin typeface="Courier"/>
               </a:rPr>
-              <a:t>## Total    49  306.532 1.00000                 </a:t>
+              <a:t>## Total    49   453.78 1.00000                 </a:t>
             </a:r>
             <a:br/>
             <a:r>
@@ -21463,7 +21575,7 @@
                 </a:solidFill>
                 <a:latin typeface="Courier"/>
               </a:rPr>
-              <a:t>## $TJH_vs_LEH</a:t>
+              <a:t>## $TJH_vs_HD</a:t>
             </a:r>
             <a:br/>
             <a:r>
@@ -21473,7 +21585,7 @@
                 </a:solidFill>
                 <a:latin typeface="Courier"/>
               </a:rPr>
-              <a:t>##          Df SumOfSqs      R2      F Pr(&gt;F)   </a:t>
+              <a:t>##          Df SumOfSqs      R2      F Pr(&gt;F)    </a:t>
             </a:r>
             <a:br/>
             <a:r>
@@ -21483,7 +21595,7 @@
                 </a:solidFill>
                 <a:latin typeface="Courier"/>
               </a:rPr>
-              <a:t>## Model     1    47.72 0.10517 5.6414  0.002 **</a:t>
+              <a:t>## Model     1   69.308 0.25135 11.751  0.001 ***</a:t>
             </a:r>
             <a:br/>
             <a:r>
@@ -21493,7 +21605,7 @@
                 </a:solidFill>
                 <a:latin typeface="Courier"/>
               </a:rPr>
-              <a:t>## Residual 48   406.06 0.89483                 </a:t>
+              <a:t>## Residual 35  206.432 0.74865                  </a:t>
             </a:r>
             <a:br/>
             <a:r>
@@ -21503,7 +21615,7 @@
                 </a:solidFill>
                 <a:latin typeface="Courier"/>
               </a:rPr>
-              <a:t>## Total    49   453.78 1.00000                 </a:t>
+              <a:t>## Total    36  275.740 1.00000                  </a:t>
             </a:r>
             <a:br/>
             <a:r>
@@ -21543,7 +21655,7 @@
                 </a:solidFill>
                 <a:latin typeface="Courier"/>
               </a:rPr>
-              <a:t>## $TJH_vs_HD</a:t>
+              <a:t>## $DG_vs_LEH</a:t>
             </a:r>
             <a:br/>
             <a:r>
@@ -21553,7 +21665,7 @@
                 </a:solidFill>
                 <a:latin typeface="Courier"/>
               </a:rPr>
-              <a:t>##          Df SumOfSqs      R2      F Pr(&gt;F)    </a:t>
+              <a:t>##          Df SumOfSqs      R2      F Pr(&gt;F)  </a:t>
             </a:r>
             <a:br/>
             <a:r>
@@ -21563,87 +21675,7 @@
                 </a:solidFill>
                 <a:latin typeface="Courier"/>
               </a:rPr>
-              <a:t>## Model     1   69.308 0.25135 11.751  0.001 ***</a:t>
-            </a:r>
-            <a:br/>
-            <a:r>
-              <a:rPr i="1">
-                <a:solidFill>
-                  <a:srgbClr val="5E5E5E"/>
-                </a:solidFill>
-                <a:latin typeface="Courier"/>
-              </a:rPr>
-              <a:t>## Residual 35  206.432 0.74865                  </a:t>
-            </a:r>
-            <a:br/>
-            <a:r>
-              <a:rPr i="1">
-                <a:solidFill>
-                  <a:srgbClr val="5E5E5E"/>
-                </a:solidFill>
-                <a:latin typeface="Courier"/>
-              </a:rPr>
-              <a:t>## Total    36  275.740 1.00000                  </a:t>
-            </a:r>
-            <a:br/>
-            <a:r>
-              <a:rPr i="1">
-                <a:solidFill>
-                  <a:srgbClr val="5E5E5E"/>
-                </a:solidFill>
-                <a:latin typeface="Courier"/>
-              </a:rPr>
-              <a:t>## ---</a:t>
-            </a:r>
-            <a:br/>
-            <a:r>
-              <a:rPr i="1">
-                <a:solidFill>
-                  <a:srgbClr val="5E5E5E"/>
-                </a:solidFill>
-                <a:latin typeface="Courier"/>
-              </a:rPr>
-              <a:t>## Signif. codes:  0 '***' 0.001 '**' 0.01 '*' 0.05 '.' 0.1 ' ' 1</a:t>
-            </a:r>
-            <a:br/>
-            <a:r>
-              <a:rPr i="1">
-                <a:solidFill>
-                  <a:srgbClr val="5E5E5E"/>
-                </a:solidFill>
-                <a:latin typeface="Courier"/>
-              </a:rPr>
-              <a:t>## </a:t>
-            </a:r>
-            <a:br/>
-            <a:r>
-              <a:rPr i="1">
-                <a:solidFill>
-                  <a:srgbClr val="5E5E5E"/>
-                </a:solidFill>
-                <a:latin typeface="Courier"/>
-              </a:rPr>
-              <a:t>## $DG_vs_LEH</a:t>
-            </a:r>
-            <a:br/>
-            <a:r>
-              <a:rPr i="1">
-                <a:solidFill>
-                  <a:srgbClr val="5E5E5E"/>
-                </a:solidFill>
-                <a:latin typeface="Courier"/>
-              </a:rPr>
-              <a:t>##          Df SumOfSqs      R2      F Pr(&gt;F)  </a:t>
-            </a:r>
-            <a:br/>
-            <a:r>
-              <a:rPr i="1">
-                <a:solidFill>
-                  <a:srgbClr val="5E5E5E"/>
-                </a:solidFill>
-                <a:latin typeface="Courier"/>
-              </a:rPr>
-              <a:t>## Model     1    26.24 0.06493 3.3333  0.027 *</a:t>
+              <a:t>## Model     1    26.24 0.06493 3.3333   0.02 *</a:t>
             </a:r>
             <a:br/>
             <a:r>
@@ -22314,7 +22346,7 @@
                 </a:solidFill>
                 <a:latin typeface="Courier"/>
               </a:rPr>
-              <a:t>## LEH 0.126 0.006 -    </a:t>
+              <a:t>## LEH 0.114 0.006 -    </a:t>
             </a:r>
             <a:br/>
             <a:r>
@@ -22324,7 +22356,7 @@
                 </a:solidFill>
                 <a:latin typeface="Courier"/>
               </a:rPr>
-              <a:t>## TJH 0.030 0.006 0.018</a:t>
+              <a:t>## TJH 0.006 0.006 0.006</a:t>
             </a:r>
             <a:br/>
             <a:r>

--- a/docs/content/multivariate_statistics/multivariate_statistics_lecture.pptx
+++ b/docs/content/multivariate_statistics/multivariate_statistics_lecture.pptx
@@ -21515,7 +21515,7 @@
                 </a:solidFill>
                 <a:latin typeface="Courier"/>
               </a:rPr>
-              <a:t>## Model     1    47.72 0.10517 5.6414  0.005 **</a:t>
+              <a:t>## Model     1    47.72 0.10517 5.6414  0.003 **</a:t>
             </a:r>
             <a:br/>
             <a:r>
@@ -22346,7 +22346,7 @@
                 </a:solidFill>
                 <a:latin typeface="Courier"/>
               </a:rPr>
-              <a:t>## LEH 0.114 0.006 -    </a:t>
+              <a:t>## LEH 0.054 0.006 -    </a:t>
             </a:r>
             <a:br/>
             <a:r>
@@ -22356,7 +22356,7 @@
                 </a:solidFill>
                 <a:latin typeface="Courier"/>
               </a:rPr>
-              <a:t>## TJH 0.006 0.006 0.006</a:t>
+              <a:t>## TJH 0.018 0.006 0.012</a:t>
             </a:r>
             <a:br/>
             <a:r>

--- a/docs/content/multivariate_statistics/multivariate_statistics_lecture.pptx
+++ b/docs/content/multivariate_statistics/multivariate_statistics_lecture.pptx
@@ -21425,6 +21425,166 @@
                 </a:solidFill>
                 <a:latin typeface="Courier"/>
               </a:rPr>
+              <a:t>##          Df SumOfSqs      R2      F Pr(&gt;F)   </a:t>
+            </a:r>
+            <a:br/>
+            <a:r>
+              <a:rPr i="1">
+                <a:solidFill>
+                  <a:srgbClr val="5E5E5E"/>
+                </a:solidFill>
+                <a:latin typeface="Courier"/>
+              </a:rPr>
+              <a:t>## Model     1   32.602 0.10636 5.7128  0.004 **</a:t>
+            </a:r>
+            <a:br/>
+            <a:r>
+              <a:rPr i="1">
+                <a:solidFill>
+                  <a:srgbClr val="5E5E5E"/>
+                </a:solidFill>
+                <a:latin typeface="Courier"/>
+              </a:rPr>
+              <a:t>## Residual 48  273.930 0.89364                 </a:t>
+            </a:r>
+            <a:br/>
+            <a:r>
+              <a:rPr i="1">
+                <a:solidFill>
+                  <a:srgbClr val="5E5E5E"/>
+                </a:solidFill>
+                <a:latin typeface="Courier"/>
+              </a:rPr>
+              <a:t>## Total    49  306.532 1.00000                 </a:t>
+            </a:r>
+            <a:br/>
+            <a:r>
+              <a:rPr i="1">
+                <a:solidFill>
+                  <a:srgbClr val="5E5E5E"/>
+                </a:solidFill>
+                <a:latin typeface="Courier"/>
+              </a:rPr>
+              <a:t>## ---</a:t>
+            </a:r>
+            <a:br/>
+            <a:r>
+              <a:rPr i="1">
+                <a:solidFill>
+                  <a:srgbClr val="5E5E5E"/>
+                </a:solidFill>
+                <a:latin typeface="Courier"/>
+              </a:rPr>
+              <a:t>## Signif. codes:  0 '***' 0.001 '**' 0.01 '*' 0.05 '.' 0.1 ' ' 1</a:t>
+            </a:r>
+            <a:br/>
+            <a:r>
+              <a:rPr i="1">
+                <a:solidFill>
+                  <a:srgbClr val="5E5E5E"/>
+                </a:solidFill>
+                <a:latin typeface="Courier"/>
+              </a:rPr>
+              <a:t>## </a:t>
+            </a:r>
+            <a:br/>
+            <a:r>
+              <a:rPr i="1">
+                <a:solidFill>
+                  <a:srgbClr val="5E5E5E"/>
+                </a:solidFill>
+                <a:latin typeface="Courier"/>
+              </a:rPr>
+              <a:t>## $TJH_vs_LEH</a:t>
+            </a:r>
+            <a:br/>
+            <a:r>
+              <a:rPr i="1">
+                <a:solidFill>
+                  <a:srgbClr val="5E5E5E"/>
+                </a:solidFill>
+                <a:latin typeface="Courier"/>
+              </a:rPr>
+              <a:t>##          Df SumOfSqs      R2      F Pr(&gt;F)   </a:t>
+            </a:r>
+            <a:br/>
+            <a:r>
+              <a:rPr i="1">
+                <a:solidFill>
+                  <a:srgbClr val="5E5E5E"/>
+                </a:solidFill>
+                <a:latin typeface="Courier"/>
+              </a:rPr>
+              <a:t>## Model     1    47.72 0.10517 5.6414  0.002 **</a:t>
+            </a:r>
+            <a:br/>
+            <a:r>
+              <a:rPr i="1">
+                <a:solidFill>
+                  <a:srgbClr val="5E5E5E"/>
+                </a:solidFill>
+                <a:latin typeface="Courier"/>
+              </a:rPr>
+              <a:t>## Residual 48   406.06 0.89483                 </a:t>
+            </a:r>
+            <a:br/>
+            <a:r>
+              <a:rPr i="1">
+                <a:solidFill>
+                  <a:srgbClr val="5E5E5E"/>
+                </a:solidFill>
+                <a:latin typeface="Courier"/>
+              </a:rPr>
+              <a:t>## Total    49   453.78 1.00000                 </a:t>
+            </a:r>
+            <a:br/>
+            <a:r>
+              <a:rPr i="1">
+                <a:solidFill>
+                  <a:srgbClr val="5E5E5E"/>
+                </a:solidFill>
+                <a:latin typeface="Courier"/>
+              </a:rPr>
+              <a:t>## ---</a:t>
+            </a:r>
+            <a:br/>
+            <a:r>
+              <a:rPr i="1">
+                <a:solidFill>
+                  <a:srgbClr val="5E5E5E"/>
+                </a:solidFill>
+                <a:latin typeface="Courier"/>
+              </a:rPr>
+              <a:t>## Signif. codes:  0 '***' 0.001 '**' 0.01 '*' 0.05 '.' 0.1 ' ' 1</a:t>
+            </a:r>
+            <a:br/>
+            <a:r>
+              <a:rPr i="1">
+                <a:solidFill>
+                  <a:srgbClr val="5E5E5E"/>
+                </a:solidFill>
+                <a:latin typeface="Courier"/>
+              </a:rPr>
+              <a:t>## </a:t>
+            </a:r>
+            <a:br/>
+            <a:r>
+              <a:rPr i="1">
+                <a:solidFill>
+                  <a:srgbClr val="5E5E5E"/>
+                </a:solidFill>
+                <a:latin typeface="Courier"/>
+              </a:rPr>
+              <a:t>## $TJH_vs_HD</a:t>
+            </a:r>
+            <a:br/>
+            <a:r>
+              <a:rPr i="1">
+                <a:solidFill>
+                  <a:srgbClr val="5E5E5E"/>
+                </a:solidFill>
+                <a:latin typeface="Courier"/>
+              </a:rPr>
               <a:t>##          Df SumOfSqs      R2      F Pr(&gt;F)    </a:t>
             </a:r>
             <a:br/>
@@ -21435,7 +21595,7 @@
                 </a:solidFill>
                 <a:latin typeface="Courier"/>
               </a:rPr>
-              <a:t>## Model     1   32.602 0.10636 5.7128  0.001 ***</a:t>
+              <a:t>## Model     1   69.308 0.25135 11.751  0.001 ***</a:t>
             </a:r>
             <a:br/>
             <a:r>
@@ -21445,7 +21605,7 @@
                 </a:solidFill>
                 <a:latin typeface="Courier"/>
               </a:rPr>
-              <a:t>## Residual 48  273.930 0.89364                  </a:t>
+              <a:t>## Residual 35  206.432 0.74865                  </a:t>
             </a:r>
             <a:br/>
             <a:r>
@@ -21455,7 +21615,7 @@
                 </a:solidFill>
                 <a:latin typeface="Courier"/>
               </a:rPr>
-              <a:t>## Total    49  306.532 1.00000                  </a:t>
+              <a:t>## Total    36  275.740 1.00000                  </a:t>
             </a:r>
             <a:br/>
             <a:r>
@@ -21495,7 +21655,7 @@
                 </a:solidFill>
                 <a:latin typeface="Courier"/>
               </a:rPr>
-              <a:t>## $TJH_vs_LEH</a:t>
+              <a:t>## $DG_vs_LEH</a:t>
             </a:r>
             <a:br/>
             <a:r>
@@ -21505,7 +21665,7 @@
                 </a:solidFill>
                 <a:latin typeface="Courier"/>
               </a:rPr>
-              <a:t>##          Df SumOfSqs      R2      F Pr(&gt;F)   </a:t>
+              <a:t>##          Df SumOfSqs      R2      F Pr(&gt;F)  </a:t>
             </a:r>
             <a:br/>
             <a:r>
@@ -21515,167 +21675,7 @@
                 </a:solidFill>
                 <a:latin typeface="Courier"/>
               </a:rPr>
-              <a:t>## Model     1    47.72 0.10517 5.6414  0.003 **</a:t>
-            </a:r>
-            <a:br/>
-            <a:r>
-              <a:rPr i="1">
-                <a:solidFill>
-                  <a:srgbClr val="5E5E5E"/>
-                </a:solidFill>
-                <a:latin typeface="Courier"/>
-              </a:rPr>
-              <a:t>## Residual 48   406.06 0.89483                 </a:t>
-            </a:r>
-            <a:br/>
-            <a:r>
-              <a:rPr i="1">
-                <a:solidFill>
-                  <a:srgbClr val="5E5E5E"/>
-                </a:solidFill>
-                <a:latin typeface="Courier"/>
-              </a:rPr>
-              <a:t>## Total    49   453.78 1.00000                 </a:t>
-            </a:r>
-            <a:br/>
-            <a:r>
-              <a:rPr i="1">
-                <a:solidFill>
-                  <a:srgbClr val="5E5E5E"/>
-                </a:solidFill>
-                <a:latin typeface="Courier"/>
-              </a:rPr>
-              <a:t>## ---</a:t>
-            </a:r>
-            <a:br/>
-            <a:r>
-              <a:rPr i="1">
-                <a:solidFill>
-                  <a:srgbClr val="5E5E5E"/>
-                </a:solidFill>
-                <a:latin typeface="Courier"/>
-              </a:rPr>
-              <a:t>## Signif. codes:  0 '***' 0.001 '**' 0.01 '*' 0.05 '.' 0.1 ' ' 1</a:t>
-            </a:r>
-            <a:br/>
-            <a:r>
-              <a:rPr i="1">
-                <a:solidFill>
-                  <a:srgbClr val="5E5E5E"/>
-                </a:solidFill>
-                <a:latin typeface="Courier"/>
-              </a:rPr>
-              <a:t>## </a:t>
-            </a:r>
-            <a:br/>
-            <a:r>
-              <a:rPr i="1">
-                <a:solidFill>
-                  <a:srgbClr val="5E5E5E"/>
-                </a:solidFill>
-                <a:latin typeface="Courier"/>
-              </a:rPr>
-              <a:t>## $TJH_vs_HD</a:t>
-            </a:r>
-            <a:br/>
-            <a:r>
-              <a:rPr i="1">
-                <a:solidFill>
-                  <a:srgbClr val="5E5E5E"/>
-                </a:solidFill>
-                <a:latin typeface="Courier"/>
-              </a:rPr>
-              <a:t>##          Df SumOfSqs      R2      F Pr(&gt;F)    </a:t>
-            </a:r>
-            <a:br/>
-            <a:r>
-              <a:rPr i="1">
-                <a:solidFill>
-                  <a:srgbClr val="5E5E5E"/>
-                </a:solidFill>
-                <a:latin typeface="Courier"/>
-              </a:rPr>
-              <a:t>## Model     1   69.308 0.25135 11.751  0.001 ***</a:t>
-            </a:r>
-            <a:br/>
-            <a:r>
-              <a:rPr i="1">
-                <a:solidFill>
-                  <a:srgbClr val="5E5E5E"/>
-                </a:solidFill>
-                <a:latin typeface="Courier"/>
-              </a:rPr>
-              <a:t>## Residual 35  206.432 0.74865                  </a:t>
-            </a:r>
-            <a:br/>
-            <a:r>
-              <a:rPr i="1">
-                <a:solidFill>
-                  <a:srgbClr val="5E5E5E"/>
-                </a:solidFill>
-                <a:latin typeface="Courier"/>
-              </a:rPr>
-              <a:t>## Total    36  275.740 1.00000                  </a:t>
-            </a:r>
-            <a:br/>
-            <a:r>
-              <a:rPr i="1">
-                <a:solidFill>
-                  <a:srgbClr val="5E5E5E"/>
-                </a:solidFill>
-                <a:latin typeface="Courier"/>
-              </a:rPr>
-              <a:t>## ---</a:t>
-            </a:r>
-            <a:br/>
-            <a:r>
-              <a:rPr i="1">
-                <a:solidFill>
-                  <a:srgbClr val="5E5E5E"/>
-                </a:solidFill>
-                <a:latin typeface="Courier"/>
-              </a:rPr>
-              <a:t>## Signif. codes:  0 '***' 0.001 '**' 0.01 '*' 0.05 '.' 0.1 ' ' 1</a:t>
-            </a:r>
-            <a:br/>
-            <a:r>
-              <a:rPr i="1">
-                <a:solidFill>
-                  <a:srgbClr val="5E5E5E"/>
-                </a:solidFill>
-                <a:latin typeface="Courier"/>
-              </a:rPr>
-              <a:t>## </a:t>
-            </a:r>
-            <a:br/>
-            <a:r>
-              <a:rPr i="1">
-                <a:solidFill>
-                  <a:srgbClr val="5E5E5E"/>
-                </a:solidFill>
-                <a:latin typeface="Courier"/>
-              </a:rPr>
-              <a:t>## $DG_vs_LEH</a:t>
-            </a:r>
-            <a:br/>
-            <a:r>
-              <a:rPr i="1">
-                <a:solidFill>
-                  <a:srgbClr val="5E5E5E"/>
-                </a:solidFill>
-                <a:latin typeface="Courier"/>
-              </a:rPr>
-              <a:t>##          Df SumOfSqs      R2      F Pr(&gt;F)  </a:t>
-            </a:r>
-            <a:br/>
-            <a:r>
-              <a:rPr i="1">
-                <a:solidFill>
-                  <a:srgbClr val="5E5E5E"/>
-                </a:solidFill>
-                <a:latin typeface="Courier"/>
-              </a:rPr>
-              <a:t>## Model     1    26.24 0.06493 3.3333   0.02 *</a:t>
+              <a:t>## Model     1    26.24 0.06493 3.3333  0.019 *</a:t>
             </a:r>
             <a:br/>
             <a:r>
@@ -22346,7 +22346,7 @@
                 </a:solidFill>
                 <a:latin typeface="Courier"/>
               </a:rPr>
-              <a:t>## LEH 0.054 0.006 -    </a:t>
+              <a:t>## LEH 0.114 0.006 -    </a:t>
             </a:r>
             <a:br/>
             <a:r>
@@ -22356,7 +22356,7 @@
                 </a:solidFill>
                 <a:latin typeface="Courier"/>
               </a:rPr>
-              <a:t>## TJH 0.018 0.006 0.012</a:t>
+              <a:t>## TJH 0.018 0.006 0.018</a:t>
             </a:r>
             <a:br/>
             <a:r>

--- a/docs/content/multivariate_statistics/multivariate_statistics_lecture.pptx
+++ b/docs/content/multivariate_statistics/multivariate_statistics_lecture.pptx
@@ -21425,6 +21425,86 @@
                 </a:solidFill>
                 <a:latin typeface="Courier"/>
               </a:rPr>
+              <a:t>##          Df SumOfSqs      R2      F Pr(&gt;F)    </a:t>
+            </a:r>
+            <a:br/>
+            <a:r>
+              <a:rPr i="1">
+                <a:solidFill>
+                  <a:srgbClr val="5E5E5E"/>
+                </a:solidFill>
+                <a:latin typeface="Courier"/>
+              </a:rPr>
+              <a:t>## Model     1   32.602 0.10636 5.7128  0.001 ***</a:t>
+            </a:r>
+            <a:br/>
+            <a:r>
+              <a:rPr i="1">
+                <a:solidFill>
+                  <a:srgbClr val="5E5E5E"/>
+                </a:solidFill>
+                <a:latin typeface="Courier"/>
+              </a:rPr>
+              <a:t>## Residual 48  273.930 0.89364                  </a:t>
+            </a:r>
+            <a:br/>
+            <a:r>
+              <a:rPr i="1">
+                <a:solidFill>
+                  <a:srgbClr val="5E5E5E"/>
+                </a:solidFill>
+                <a:latin typeface="Courier"/>
+              </a:rPr>
+              <a:t>## Total    49  306.532 1.00000                  </a:t>
+            </a:r>
+            <a:br/>
+            <a:r>
+              <a:rPr i="1">
+                <a:solidFill>
+                  <a:srgbClr val="5E5E5E"/>
+                </a:solidFill>
+                <a:latin typeface="Courier"/>
+              </a:rPr>
+              <a:t>## ---</a:t>
+            </a:r>
+            <a:br/>
+            <a:r>
+              <a:rPr i="1">
+                <a:solidFill>
+                  <a:srgbClr val="5E5E5E"/>
+                </a:solidFill>
+                <a:latin typeface="Courier"/>
+              </a:rPr>
+              <a:t>## Signif. codes:  0 '***' 0.001 '**' 0.01 '*' 0.05 '.' 0.1 ' ' 1</a:t>
+            </a:r>
+            <a:br/>
+            <a:r>
+              <a:rPr i="1">
+                <a:solidFill>
+                  <a:srgbClr val="5E5E5E"/>
+                </a:solidFill>
+                <a:latin typeface="Courier"/>
+              </a:rPr>
+              <a:t>## </a:t>
+            </a:r>
+            <a:br/>
+            <a:r>
+              <a:rPr i="1">
+                <a:solidFill>
+                  <a:srgbClr val="5E5E5E"/>
+                </a:solidFill>
+                <a:latin typeface="Courier"/>
+              </a:rPr>
+              <a:t>## $TJH_vs_LEH</a:t>
+            </a:r>
+            <a:br/>
+            <a:r>
+              <a:rPr i="1">
+                <a:solidFill>
+                  <a:srgbClr val="5E5E5E"/>
+                </a:solidFill>
+                <a:latin typeface="Courier"/>
+              </a:rPr>
               <a:t>##          Df SumOfSqs      R2      F Pr(&gt;F)   </a:t>
             </a:r>
             <a:br/>
@@ -21435,7 +21515,7 @@
                 </a:solidFill>
                 <a:latin typeface="Courier"/>
               </a:rPr>
-              <a:t>## Model     1   32.602 0.10636 5.7128  0.004 **</a:t>
+              <a:t>## Model     1    47.72 0.10517 5.6414  0.003 **</a:t>
             </a:r>
             <a:br/>
             <a:r>
@@ -21445,7 +21525,7 @@
                 </a:solidFill>
                 <a:latin typeface="Courier"/>
               </a:rPr>
-              <a:t>## Residual 48  273.930 0.89364                 </a:t>
+              <a:t>## Residual 48   406.06 0.89483                 </a:t>
             </a:r>
             <a:br/>
             <a:r>
@@ -21455,7 +21535,7 @@
                 </a:solidFill>
                 <a:latin typeface="Courier"/>
               </a:rPr>
-              <a:t>## Total    49  306.532 1.00000                 </a:t>
+              <a:t>## Total    49   453.78 1.00000                 </a:t>
             </a:r>
             <a:br/>
             <a:r>
@@ -21495,7 +21575,7 @@
                 </a:solidFill>
                 <a:latin typeface="Courier"/>
               </a:rPr>
-              <a:t>## $TJH_vs_LEH</a:t>
+              <a:t>## $TJH_vs_HD</a:t>
             </a:r>
             <a:br/>
             <a:r>
@@ -21505,7 +21585,7 @@
                 </a:solidFill>
                 <a:latin typeface="Courier"/>
               </a:rPr>
-              <a:t>##          Df SumOfSqs      R2      F Pr(&gt;F)   </a:t>
+              <a:t>##          Df SumOfSqs      R2      F Pr(&gt;F)    </a:t>
             </a:r>
             <a:br/>
             <a:r>
@@ -21515,7 +21595,7 @@
                 </a:solidFill>
                 <a:latin typeface="Courier"/>
               </a:rPr>
-              <a:t>## Model     1    47.72 0.10517 5.6414  0.002 **</a:t>
+              <a:t>## Model     1   69.308 0.25135 11.751  0.001 ***</a:t>
             </a:r>
             <a:br/>
             <a:r>
@@ -21525,7 +21605,7 @@
                 </a:solidFill>
                 <a:latin typeface="Courier"/>
               </a:rPr>
-              <a:t>## Residual 48   406.06 0.89483                 </a:t>
+              <a:t>## Residual 35  206.432 0.74865                  </a:t>
             </a:r>
             <a:br/>
             <a:r>
@@ -21535,7 +21615,7 @@
                 </a:solidFill>
                 <a:latin typeface="Courier"/>
               </a:rPr>
-              <a:t>## Total    49   453.78 1.00000                 </a:t>
+              <a:t>## Total    36  275.740 1.00000                  </a:t>
             </a:r>
             <a:br/>
             <a:r>
@@ -21575,7 +21655,7 @@
                 </a:solidFill>
                 <a:latin typeface="Courier"/>
               </a:rPr>
-              <a:t>## $TJH_vs_HD</a:t>
+              <a:t>## $DG_vs_LEH</a:t>
             </a:r>
             <a:br/>
             <a:r>
@@ -21585,7 +21665,7 @@
                 </a:solidFill>
                 <a:latin typeface="Courier"/>
               </a:rPr>
-              <a:t>##          Df SumOfSqs      R2      F Pr(&gt;F)    </a:t>
+              <a:t>##          Df SumOfSqs      R2      F Pr(&gt;F)  </a:t>
             </a:r>
             <a:br/>
             <a:r>
@@ -21595,87 +21675,7 @@
                 </a:solidFill>
                 <a:latin typeface="Courier"/>
               </a:rPr>
-              <a:t>## Model     1   69.308 0.25135 11.751  0.001 ***</a:t>
-            </a:r>
-            <a:br/>
-            <a:r>
-              <a:rPr i="1">
-                <a:solidFill>
-                  <a:srgbClr val="5E5E5E"/>
-                </a:solidFill>
-                <a:latin typeface="Courier"/>
-              </a:rPr>
-              <a:t>## Residual 35  206.432 0.74865                  </a:t>
-            </a:r>
-            <a:br/>
-            <a:r>
-              <a:rPr i="1">
-                <a:solidFill>
-                  <a:srgbClr val="5E5E5E"/>
-                </a:solidFill>
-                <a:latin typeface="Courier"/>
-              </a:rPr>
-              <a:t>## Total    36  275.740 1.00000                  </a:t>
-            </a:r>
-            <a:br/>
-            <a:r>
-              <a:rPr i="1">
-                <a:solidFill>
-                  <a:srgbClr val="5E5E5E"/>
-                </a:solidFill>
-                <a:latin typeface="Courier"/>
-              </a:rPr>
-              <a:t>## ---</a:t>
-            </a:r>
-            <a:br/>
-            <a:r>
-              <a:rPr i="1">
-                <a:solidFill>
-                  <a:srgbClr val="5E5E5E"/>
-                </a:solidFill>
-                <a:latin typeface="Courier"/>
-              </a:rPr>
-              <a:t>## Signif. codes:  0 '***' 0.001 '**' 0.01 '*' 0.05 '.' 0.1 ' ' 1</a:t>
-            </a:r>
-            <a:br/>
-            <a:r>
-              <a:rPr i="1">
-                <a:solidFill>
-                  <a:srgbClr val="5E5E5E"/>
-                </a:solidFill>
-                <a:latin typeface="Courier"/>
-              </a:rPr>
-              <a:t>## </a:t>
-            </a:r>
-            <a:br/>
-            <a:r>
-              <a:rPr i="1">
-                <a:solidFill>
-                  <a:srgbClr val="5E5E5E"/>
-                </a:solidFill>
-                <a:latin typeface="Courier"/>
-              </a:rPr>
-              <a:t>## $DG_vs_LEH</a:t>
-            </a:r>
-            <a:br/>
-            <a:r>
-              <a:rPr i="1">
-                <a:solidFill>
-                  <a:srgbClr val="5E5E5E"/>
-                </a:solidFill>
-                <a:latin typeface="Courier"/>
-              </a:rPr>
-              <a:t>##          Df SumOfSqs      R2      F Pr(&gt;F)  </a:t>
-            </a:r>
-            <a:br/>
-            <a:r>
-              <a:rPr i="1">
-                <a:solidFill>
-                  <a:srgbClr val="5E5E5E"/>
-                </a:solidFill>
-                <a:latin typeface="Courier"/>
-              </a:rPr>
-              <a:t>## Model     1    26.24 0.06493 3.3333  0.019 *</a:t>
+              <a:t>## Model     1    26.24 0.06493 3.3333  0.021 *</a:t>
             </a:r>
             <a:br/>
             <a:r>
@@ -22346,7 +22346,7 @@
                 </a:solidFill>
                 <a:latin typeface="Courier"/>
               </a:rPr>
-              <a:t>## LEH 0.114 0.006 -    </a:t>
+              <a:t>## LEH 0.120 0.006 -    </a:t>
             </a:r>
             <a:br/>
             <a:r>
@@ -22356,7 +22356,7 @@
                 </a:solidFill>
                 <a:latin typeface="Courier"/>
               </a:rPr>
-              <a:t>## TJH 0.018 0.006 0.018</a:t>
+              <a:t>## TJH 0.012 0.006 0.012</a:t>
             </a:r>
             <a:br/>
             <a:r>

--- a/docs/content/multivariate_statistics/multivariate_statistics_lecture.pptx
+++ b/docs/content/multivariate_statistics/multivariate_statistics_lecture.pptx
@@ -21505,7 +21505,7 @@
                 </a:solidFill>
                 <a:latin typeface="Courier"/>
               </a:rPr>
-              <a:t>##          Df SumOfSqs      R2      F Pr(&gt;F)   </a:t>
+              <a:t>##          Df SumOfSqs      R2      F Pr(&gt;F)    </a:t>
             </a:r>
             <a:br/>
             <a:r>
@@ -21515,7 +21515,7 @@
                 </a:solidFill>
                 <a:latin typeface="Courier"/>
               </a:rPr>
-              <a:t>## Model     1    47.72 0.10517 5.6414  0.003 **</a:t>
+              <a:t>## Model     1    47.72 0.10517 5.6414  0.001 ***</a:t>
             </a:r>
             <a:br/>
             <a:r>
@@ -21525,7 +21525,7 @@
                 </a:solidFill>
                 <a:latin typeface="Courier"/>
               </a:rPr>
-              <a:t>## Residual 48   406.06 0.89483                 </a:t>
+              <a:t>## Residual 48   406.06 0.89483                  </a:t>
             </a:r>
             <a:br/>
             <a:r>
@@ -21535,7 +21535,7 @@
                 </a:solidFill>
                 <a:latin typeface="Courier"/>
               </a:rPr>
-              <a:t>## Total    49   453.78 1.00000                 </a:t>
+              <a:t>## Total    49   453.78 1.00000                  </a:t>
             </a:r>
             <a:br/>
             <a:r>
@@ -21675,7 +21675,7 @@
                 </a:solidFill>
                 <a:latin typeface="Courier"/>
               </a:rPr>
-              <a:t>## Model     1    26.24 0.06493 3.3333  0.021 *</a:t>
+              <a:t>## Model     1    26.24 0.06493 3.3333  0.025 *</a:t>
             </a:r>
             <a:br/>
             <a:r>
@@ -22346,7 +22346,7 @@
                 </a:solidFill>
                 <a:latin typeface="Courier"/>
               </a:rPr>
-              <a:t>## LEH 0.120 0.006 -    </a:t>
+              <a:t>## LEH 0.132 0.006 -    </a:t>
             </a:r>
             <a:br/>
             <a:r>
@@ -22356,7 +22356,7 @@
                 </a:solidFill>
                 <a:latin typeface="Courier"/>
               </a:rPr>
-              <a:t>## TJH 0.012 0.006 0.012</a:t>
+              <a:t>## TJH 0.018 0.006 0.048</a:t>
             </a:r>
             <a:br/>
             <a:r>

--- a/docs/content/multivariate_statistics/multivariate_statistics_lecture.pptx
+++ b/docs/content/multivariate_statistics/multivariate_statistics_lecture.pptx
@@ -21425,6 +21425,166 @@
                 </a:solidFill>
                 <a:latin typeface="Courier"/>
               </a:rPr>
+              <a:t>##          Df SumOfSqs      R2      F Pr(&gt;F)   </a:t>
+            </a:r>
+            <a:br/>
+            <a:r>
+              <a:rPr i="1">
+                <a:solidFill>
+                  <a:srgbClr val="5E5E5E"/>
+                </a:solidFill>
+                <a:latin typeface="Courier"/>
+              </a:rPr>
+              <a:t>## Model     1   32.602 0.10636 5.7128  0.002 **</a:t>
+            </a:r>
+            <a:br/>
+            <a:r>
+              <a:rPr i="1">
+                <a:solidFill>
+                  <a:srgbClr val="5E5E5E"/>
+                </a:solidFill>
+                <a:latin typeface="Courier"/>
+              </a:rPr>
+              <a:t>## Residual 48  273.930 0.89364                 </a:t>
+            </a:r>
+            <a:br/>
+            <a:r>
+              <a:rPr i="1">
+                <a:solidFill>
+                  <a:srgbClr val="5E5E5E"/>
+                </a:solidFill>
+                <a:latin typeface="Courier"/>
+              </a:rPr>
+              <a:t>## Total    49  306.532 1.00000                 </a:t>
+            </a:r>
+            <a:br/>
+            <a:r>
+              <a:rPr i="1">
+                <a:solidFill>
+                  <a:srgbClr val="5E5E5E"/>
+                </a:solidFill>
+                <a:latin typeface="Courier"/>
+              </a:rPr>
+              <a:t>## ---</a:t>
+            </a:r>
+            <a:br/>
+            <a:r>
+              <a:rPr i="1">
+                <a:solidFill>
+                  <a:srgbClr val="5E5E5E"/>
+                </a:solidFill>
+                <a:latin typeface="Courier"/>
+              </a:rPr>
+              <a:t>## Signif. codes:  0 '***' 0.001 '**' 0.01 '*' 0.05 '.' 0.1 ' ' 1</a:t>
+            </a:r>
+            <a:br/>
+            <a:r>
+              <a:rPr i="1">
+                <a:solidFill>
+                  <a:srgbClr val="5E5E5E"/>
+                </a:solidFill>
+                <a:latin typeface="Courier"/>
+              </a:rPr>
+              <a:t>## </a:t>
+            </a:r>
+            <a:br/>
+            <a:r>
+              <a:rPr i="1">
+                <a:solidFill>
+                  <a:srgbClr val="5E5E5E"/>
+                </a:solidFill>
+                <a:latin typeface="Courier"/>
+              </a:rPr>
+              <a:t>## $TJH_vs_LEH</a:t>
+            </a:r>
+            <a:br/>
+            <a:r>
+              <a:rPr i="1">
+                <a:solidFill>
+                  <a:srgbClr val="5E5E5E"/>
+                </a:solidFill>
+                <a:latin typeface="Courier"/>
+              </a:rPr>
+              <a:t>##          Df SumOfSqs      R2      F Pr(&gt;F)   </a:t>
+            </a:r>
+            <a:br/>
+            <a:r>
+              <a:rPr i="1">
+                <a:solidFill>
+                  <a:srgbClr val="5E5E5E"/>
+                </a:solidFill>
+                <a:latin typeface="Courier"/>
+              </a:rPr>
+              <a:t>## Model     1    47.72 0.10517 5.6414  0.002 **</a:t>
+            </a:r>
+            <a:br/>
+            <a:r>
+              <a:rPr i="1">
+                <a:solidFill>
+                  <a:srgbClr val="5E5E5E"/>
+                </a:solidFill>
+                <a:latin typeface="Courier"/>
+              </a:rPr>
+              <a:t>## Residual 48   406.06 0.89483                 </a:t>
+            </a:r>
+            <a:br/>
+            <a:r>
+              <a:rPr i="1">
+                <a:solidFill>
+                  <a:srgbClr val="5E5E5E"/>
+                </a:solidFill>
+                <a:latin typeface="Courier"/>
+              </a:rPr>
+              <a:t>## Total    49   453.78 1.00000                 </a:t>
+            </a:r>
+            <a:br/>
+            <a:r>
+              <a:rPr i="1">
+                <a:solidFill>
+                  <a:srgbClr val="5E5E5E"/>
+                </a:solidFill>
+                <a:latin typeface="Courier"/>
+              </a:rPr>
+              <a:t>## ---</a:t>
+            </a:r>
+            <a:br/>
+            <a:r>
+              <a:rPr i="1">
+                <a:solidFill>
+                  <a:srgbClr val="5E5E5E"/>
+                </a:solidFill>
+                <a:latin typeface="Courier"/>
+              </a:rPr>
+              <a:t>## Signif. codes:  0 '***' 0.001 '**' 0.01 '*' 0.05 '.' 0.1 ' ' 1</a:t>
+            </a:r>
+            <a:br/>
+            <a:r>
+              <a:rPr i="1">
+                <a:solidFill>
+                  <a:srgbClr val="5E5E5E"/>
+                </a:solidFill>
+                <a:latin typeface="Courier"/>
+              </a:rPr>
+              <a:t>## </a:t>
+            </a:r>
+            <a:br/>
+            <a:r>
+              <a:rPr i="1">
+                <a:solidFill>
+                  <a:srgbClr val="5E5E5E"/>
+                </a:solidFill>
+                <a:latin typeface="Courier"/>
+              </a:rPr>
+              <a:t>## $TJH_vs_HD</a:t>
+            </a:r>
+            <a:br/>
+            <a:r>
+              <a:rPr i="1">
+                <a:solidFill>
+                  <a:srgbClr val="5E5E5E"/>
+                </a:solidFill>
+                <a:latin typeface="Courier"/>
+              </a:rPr>
               <a:t>##          Df SumOfSqs      R2      F Pr(&gt;F)    </a:t>
             </a:r>
             <a:br/>
@@ -21435,7 +21595,7 @@
                 </a:solidFill>
                 <a:latin typeface="Courier"/>
               </a:rPr>
-              <a:t>## Model     1   32.602 0.10636 5.7128  0.001 ***</a:t>
+              <a:t>## Model     1   69.308 0.25135 11.751  0.001 ***</a:t>
             </a:r>
             <a:br/>
             <a:r>
@@ -21445,7 +21605,7 @@
                 </a:solidFill>
                 <a:latin typeface="Courier"/>
               </a:rPr>
-              <a:t>## Residual 48  273.930 0.89364                  </a:t>
+              <a:t>## Residual 35  206.432 0.74865                  </a:t>
             </a:r>
             <a:br/>
             <a:r>
@@ -21455,7 +21615,7 @@
                 </a:solidFill>
                 <a:latin typeface="Courier"/>
               </a:rPr>
-              <a:t>## Total    49  306.532 1.00000                  </a:t>
+              <a:t>## Total    36  275.740 1.00000                  </a:t>
             </a:r>
             <a:br/>
             <a:r>
@@ -21495,7 +21655,7 @@
                 </a:solidFill>
                 <a:latin typeface="Courier"/>
               </a:rPr>
-              <a:t>## $TJH_vs_LEH</a:t>
+              <a:t>## $DG_vs_LEH</a:t>
             </a:r>
             <a:br/>
             <a:r>
@@ -21505,7 +21665,7 @@
                 </a:solidFill>
                 <a:latin typeface="Courier"/>
               </a:rPr>
-              <a:t>##          Df SumOfSqs      R2      F Pr(&gt;F)    </a:t>
+              <a:t>##          Df SumOfSqs      R2      F Pr(&gt;F)  </a:t>
             </a:r>
             <a:br/>
             <a:r>
@@ -21515,167 +21675,7 @@
                 </a:solidFill>
                 <a:latin typeface="Courier"/>
               </a:rPr>
-              <a:t>## Model     1    47.72 0.10517 5.6414  0.001 ***</a:t>
-            </a:r>
-            <a:br/>
-            <a:r>
-              <a:rPr i="1">
-                <a:solidFill>
-                  <a:srgbClr val="5E5E5E"/>
-                </a:solidFill>
-                <a:latin typeface="Courier"/>
-              </a:rPr>
-              <a:t>## Residual 48   406.06 0.89483                  </a:t>
-            </a:r>
-            <a:br/>
-            <a:r>
-              <a:rPr i="1">
-                <a:solidFill>
-                  <a:srgbClr val="5E5E5E"/>
-                </a:solidFill>
-                <a:latin typeface="Courier"/>
-              </a:rPr>
-              <a:t>## Total    49   453.78 1.00000                  </a:t>
-            </a:r>
-            <a:br/>
-            <a:r>
-              <a:rPr i="1">
-                <a:solidFill>
-                  <a:srgbClr val="5E5E5E"/>
-                </a:solidFill>
-                <a:latin typeface="Courier"/>
-              </a:rPr>
-              <a:t>## ---</a:t>
-            </a:r>
-            <a:br/>
-            <a:r>
-              <a:rPr i="1">
-                <a:solidFill>
-                  <a:srgbClr val="5E5E5E"/>
-                </a:solidFill>
-                <a:latin typeface="Courier"/>
-              </a:rPr>
-              <a:t>## Signif. codes:  0 '***' 0.001 '**' 0.01 '*' 0.05 '.' 0.1 ' ' 1</a:t>
-            </a:r>
-            <a:br/>
-            <a:r>
-              <a:rPr i="1">
-                <a:solidFill>
-                  <a:srgbClr val="5E5E5E"/>
-                </a:solidFill>
-                <a:latin typeface="Courier"/>
-              </a:rPr>
-              <a:t>## </a:t>
-            </a:r>
-            <a:br/>
-            <a:r>
-              <a:rPr i="1">
-                <a:solidFill>
-                  <a:srgbClr val="5E5E5E"/>
-                </a:solidFill>
-                <a:latin typeface="Courier"/>
-              </a:rPr>
-              <a:t>## $TJH_vs_HD</a:t>
-            </a:r>
-            <a:br/>
-            <a:r>
-              <a:rPr i="1">
-                <a:solidFill>
-                  <a:srgbClr val="5E5E5E"/>
-                </a:solidFill>
-                <a:latin typeface="Courier"/>
-              </a:rPr>
-              <a:t>##          Df SumOfSqs      R2      F Pr(&gt;F)    </a:t>
-            </a:r>
-            <a:br/>
-            <a:r>
-              <a:rPr i="1">
-                <a:solidFill>
-                  <a:srgbClr val="5E5E5E"/>
-                </a:solidFill>
-                <a:latin typeface="Courier"/>
-              </a:rPr>
-              <a:t>## Model     1   69.308 0.25135 11.751  0.001 ***</a:t>
-            </a:r>
-            <a:br/>
-            <a:r>
-              <a:rPr i="1">
-                <a:solidFill>
-                  <a:srgbClr val="5E5E5E"/>
-                </a:solidFill>
-                <a:latin typeface="Courier"/>
-              </a:rPr>
-              <a:t>## Residual 35  206.432 0.74865                  </a:t>
-            </a:r>
-            <a:br/>
-            <a:r>
-              <a:rPr i="1">
-                <a:solidFill>
-                  <a:srgbClr val="5E5E5E"/>
-                </a:solidFill>
-                <a:latin typeface="Courier"/>
-              </a:rPr>
-              <a:t>## Total    36  275.740 1.00000                  </a:t>
-            </a:r>
-            <a:br/>
-            <a:r>
-              <a:rPr i="1">
-                <a:solidFill>
-                  <a:srgbClr val="5E5E5E"/>
-                </a:solidFill>
-                <a:latin typeface="Courier"/>
-              </a:rPr>
-              <a:t>## ---</a:t>
-            </a:r>
-            <a:br/>
-            <a:r>
-              <a:rPr i="1">
-                <a:solidFill>
-                  <a:srgbClr val="5E5E5E"/>
-                </a:solidFill>
-                <a:latin typeface="Courier"/>
-              </a:rPr>
-              <a:t>## Signif. codes:  0 '***' 0.001 '**' 0.01 '*' 0.05 '.' 0.1 ' ' 1</a:t>
-            </a:r>
-            <a:br/>
-            <a:r>
-              <a:rPr i="1">
-                <a:solidFill>
-                  <a:srgbClr val="5E5E5E"/>
-                </a:solidFill>
-                <a:latin typeface="Courier"/>
-              </a:rPr>
-              <a:t>## </a:t>
-            </a:r>
-            <a:br/>
-            <a:r>
-              <a:rPr i="1">
-                <a:solidFill>
-                  <a:srgbClr val="5E5E5E"/>
-                </a:solidFill>
-                <a:latin typeface="Courier"/>
-              </a:rPr>
-              <a:t>## $DG_vs_LEH</a:t>
-            </a:r>
-            <a:br/>
-            <a:r>
-              <a:rPr i="1">
-                <a:solidFill>
-                  <a:srgbClr val="5E5E5E"/>
-                </a:solidFill>
-                <a:latin typeface="Courier"/>
-              </a:rPr>
-              <a:t>##          Df SumOfSqs      R2      F Pr(&gt;F)  </a:t>
-            </a:r>
-            <a:br/>
-            <a:r>
-              <a:rPr i="1">
-                <a:solidFill>
-                  <a:srgbClr val="5E5E5E"/>
-                </a:solidFill>
-                <a:latin typeface="Courier"/>
-              </a:rPr>
-              <a:t>## Model     1    26.24 0.06493 3.3333  0.025 *</a:t>
+              <a:t>## Model     1    26.24 0.06493 3.3333  0.011 *</a:t>
             </a:r>
             <a:br/>
             <a:r>
@@ -22346,7 +22346,7 @@
                 </a:solidFill>
                 <a:latin typeface="Courier"/>
               </a:rPr>
-              <a:t>## LEH 0.132 0.006 -    </a:t>
+              <a:t>## LEH 0.114 0.006 -    </a:t>
             </a:r>
             <a:br/>
             <a:r>
@@ -22356,7 +22356,7 @@
                 </a:solidFill>
                 <a:latin typeface="Courier"/>
               </a:rPr>
-              <a:t>## TJH 0.018 0.006 0.048</a:t>
+              <a:t>## TJH 0.006 0.006 0.024</a:t>
             </a:r>
             <a:br/>
             <a:r>
